--- a/presentation.pptx
+++ b/presentation.pptx
@@ -9,43 +9,44 @@
     <p:sldId id="257" r:id="rId3"/>
     <p:sldId id="258" r:id="rId4"/>
     <p:sldId id="259" r:id="rId5"/>
-    <p:sldId id="260" r:id="rId6"/>
-    <p:sldId id="261" r:id="rId7"/>
-    <p:sldId id="262" r:id="rId8"/>
-    <p:sldId id="263" r:id="rId9"/>
-    <p:sldId id="264" r:id="rId10"/>
-    <p:sldId id="265" r:id="rId11"/>
-    <p:sldId id="266" r:id="rId12"/>
-    <p:sldId id="269" r:id="rId13"/>
-    <p:sldId id="270" r:id="rId14"/>
-    <p:sldId id="267" r:id="rId15"/>
-    <p:sldId id="268" r:id="rId16"/>
+    <p:sldId id="271" r:id="rId6"/>
+    <p:sldId id="260" r:id="rId7"/>
+    <p:sldId id="261" r:id="rId8"/>
+    <p:sldId id="262" r:id="rId9"/>
+    <p:sldId id="263" r:id="rId10"/>
+    <p:sldId id="264" r:id="rId11"/>
+    <p:sldId id="265" r:id="rId12"/>
+    <p:sldId id="266" r:id="rId13"/>
+    <p:sldId id="269" r:id="rId14"/>
+    <p:sldId id="270" r:id="rId15"/>
+    <p:sldId id="267" r:id="rId16"/>
+    <p:sldId id="268" r:id="rId17"/>
   </p:sldIdLst>
   <p:sldSz cx="18288000" cy="10287000"/>
   <p:notesSz cx="6858000" cy="9144000"/>
   <p:embeddedFontLst>
     <p:embeddedFont>
       <p:font typeface="Calibri" panose="020F0502020204030204" pitchFamily="34" charset="0"/>
-      <p:regular r:id="rId17"/>
-      <p:bold r:id="rId18"/>
-      <p:italic r:id="rId19"/>
-      <p:boldItalic r:id="rId20"/>
+      <p:regular r:id="rId18"/>
+      <p:bold r:id="rId19"/>
+      <p:italic r:id="rId20"/>
+      <p:boldItalic r:id="rId21"/>
     </p:embeddedFont>
     <p:embeddedFont>
       <p:font typeface="Haettenschweiler" panose="020B0706040902060204" pitchFamily="34" charset="0"/>
-      <p:regular r:id="rId21"/>
+      <p:regular r:id="rId22"/>
     </p:embeddedFont>
     <p:embeddedFont>
       <p:font typeface="Inter" panose="020B0604020202020204" charset="0"/>
-      <p:regular r:id="rId22"/>
+      <p:regular r:id="rId23"/>
     </p:embeddedFont>
     <p:embeddedFont>
       <p:font typeface="Intro" panose="02000000000000000000" charset="0"/>
-      <p:regular r:id="rId23"/>
+      <p:regular r:id="rId24"/>
     </p:embeddedFont>
     <p:embeddedFont>
       <p:font typeface="Now" panose="020B0604020202020204" charset="0"/>
-      <p:regular r:id="rId24"/>
+      <p:regular r:id="rId25"/>
     </p:embeddedFont>
   </p:embeddedFontLst>
   <p:defaultTextStyle>
@@ -3577,8 +3578,8 @@
         </p:nvSpPr>
         <p:spPr>
           <a:xfrm>
-            <a:off x="5993745" y="1842857"/>
-            <a:ext cx="6960260" cy="6960260"/>
+            <a:off x="6920478" y="2482741"/>
+            <a:ext cx="7669777" cy="5996525"/>
           </a:xfrm>
           <a:custGeom>
             <a:avLst/>
@@ -3587,18 +3588,18 @@
             <a:cxnLst/>
             <a:rect l="l" t="t" r="r" b="b"/>
             <a:pathLst>
-              <a:path w="6960260" h="6960260">
+              <a:path w="7669777" h="5996525">
                 <a:moveTo>
                   <a:pt x="0" y="0"/>
                 </a:moveTo>
                 <a:lnTo>
-                  <a:pt x="6960260" y="0"/>
+                  <a:pt x="7669777" y="0"/>
                 </a:lnTo>
                 <a:lnTo>
-                  <a:pt x="6960260" y="6960260"/>
+                  <a:pt x="7669777" y="5996526"/>
                 </a:lnTo>
                 <a:lnTo>
-                  <a:pt x="0" y="6960260"/>
+                  <a:pt x="0" y="5996526"/>
                 </a:lnTo>
                 <a:lnTo>
                   <a:pt x="0" y="0"/>
@@ -3624,7 +3625,7 @@
         <p:spPr>
           <a:xfrm>
             <a:off x="14299551" y="8660242"/>
-            <a:ext cx="2959749" cy="349250"/>
+            <a:ext cx="2959749" cy="329642"/>
           </a:xfrm>
           <a:prstGeom prst="rect">
             <a:avLst/>
@@ -3645,7 +3646,7 @@
               </a:spcBef>
             </a:pPr>
             <a:r>
-              <a:rPr lang="en-US" sz="2000" spc="600">
+              <a:rPr lang="en-US" sz="2000" spc="600" dirty="0">
                 <a:solidFill>
                   <a:srgbClr val="000000"/>
                 </a:solidFill>
@@ -3689,7 +3690,7 @@
                 </a:solidFill>
                 <a:latin typeface="Intro"/>
               </a:rPr>
-              <a:t>3.6</a:t>
+              <a:t>3.5</a:t>
             </a:r>
           </a:p>
         </p:txBody>
@@ -3730,7 +3731,7 @@
                 </a:solidFill>
                 <a:latin typeface="Inter"/>
               </a:rPr>
-              <a:t>ПРОВЕРИТЬ АДЕКВАТНОСТЬ ПОСТАВЛЕННОГО ДИАГНОЗА ПО СТАДИИ ХРОНИЧЕСКОЙ БОЛЕЗНИ ПОЧЕК</a:t>
+              <a:t>ВЕРНО ЛИ, ЧТО ДАЖЕ БЕЗ ХРОНИЧЕСКИХ БОЛЕЗНЕЙ ПОЧЕК С ВОЗРАСТОМ ТОЛЩИНА ПАРЕНХИМЫ ПОЧЕК УМЕНЬШАЕТСЯ?</a:t>
             </a:r>
           </a:p>
         </p:txBody>
@@ -3743,8 +3744,8 @@
         </p:nvSpPr>
         <p:spPr>
           <a:xfrm>
-            <a:off x="6730048" y="8765017"/>
-            <a:ext cx="7474253" cy="344761"/>
+            <a:off x="4114800" y="8157004"/>
+            <a:ext cx="12100358" cy="1054100"/>
           </a:xfrm>
           <a:prstGeom prst="rect">
             <a:avLst/>
@@ -3756,23 +3757,123 @@
           </a:bodyPr>
           <a:lstStyle/>
           <a:p>
-            <a:pPr>
+            <a:pPr algn="ctr">
               <a:lnSpc>
-                <a:spcPts val="2846"/>
+                <a:spcPts val="2800"/>
+              </a:lnSpc>
+            </a:pPr>
+            <a:endParaRPr dirty="0"/>
+          </a:p>
+          <a:p>
+            <a:pPr algn="ctr">
+              <a:lnSpc>
+                <a:spcPts val="2800"/>
               </a:lnSpc>
               <a:spcBef>
                 <a:spcPct val="0"/>
               </a:spcBef>
             </a:pPr>
             <a:r>
-              <a:rPr lang="en-US" sz="2033">
+              <a:rPr lang="en-US" sz="2000" spc="600" dirty="0">
                 <a:solidFill>
                   <a:srgbClr val="000000"/>
                 </a:solidFill>
-                <a:latin typeface="Now"/>
+                <a:latin typeface="Inter"/>
               </a:rPr>
-              <a:t>СТАДИЯ РАЗВИТИЯ ХБП ОПРЕДЕЛЯЛАСЬ ПО СКФ</a:t>
+              <a:t>statistic=-0.2286580163189256, </a:t>
             </a:r>
+            <a:r>
+              <a:rPr lang="en-US" sz="2000" spc="600" dirty="0" err="1">
+                <a:solidFill>
+                  <a:srgbClr val="000000"/>
+                </a:solidFill>
+                <a:latin typeface="Inter"/>
+              </a:rPr>
+              <a:t>pvalue</a:t>
+            </a:r>
+            <a:r>
+              <a:rPr lang="en-US" sz="2000" spc="600" dirty="0">
+                <a:solidFill>
+                  <a:srgbClr val="000000"/>
+                </a:solidFill>
+                <a:latin typeface="Inter"/>
+              </a:rPr>
+              <a:t>=0.15584536629264173</a:t>
+            </a:r>
+          </a:p>
+        </p:txBody>
+      </p:sp>
+      <p:sp>
+        <p:nvSpPr>
+          <p:cNvPr id="12" name="TextBox 11">
+            <a:extLst>
+              <a:ext uri="{FF2B5EF4-FFF2-40B4-BE49-F238E27FC236}">
+                <a16:creationId xmlns:a16="http://schemas.microsoft.com/office/drawing/2014/main" id="{9F43B054-7091-4AD9-B94D-CD19E159CB92}"/>
+              </a:ext>
+            </a:extLst>
+          </p:cNvPr>
+          <p:cNvSpPr txBox="1"/>
+          <p:nvPr/>
+        </p:nvSpPr>
+        <p:spPr>
+          <a:xfrm>
+            <a:off x="457200" y="5635873"/>
+            <a:ext cx="5867400" cy="939103"/>
+          </a:xfrm>
+          <a:prstGeom prst="rect">
+            <a:avLst/>
+          </a:prstGeom>
+        </p:spPr>
+        <p:txBody>
+          <a:bodyPr wrap="square" lIns="0" tIns="0" rIns="0" bIns="0" rtlCol="0" anchor="t">
+            <a:spAutoFit/>
+          </a:bodyPr>
+          <a:lstStyle/>
+          <a:p>
+            <a:pPr algn="ctr">
+              <a:lnSpc>
+                <a:spcPts val="3779"/>
+              </a:lnSpc>
+              <a:spcBef>
+                <a:spcPct val="0"/>
+              </a:spcBef>
+              <a:defRPr/>
+            </a:pPr>
+            <a:r>
+              <a:rPr lang="ru-RU" sz="2699" dirty="0">
+                <a:solidFill>
+                  <a:srgbClr val="A08B7B"/>
+                </a:solidFill>
+                <a:latin typeface="Intro"/>
+              </a:rPr>
+              <a:t>Неверно </a:t>
+            </a:r>
+          </a:p>
+          <a:p>
+            <a:pPr algn="ctr">
+              <a:lnSpc>
+                <a:spcPts val="3779"/>
+              </a:lnSpc>
+              <a:spcBef>
+                <a:spcPct val="0"/>
+              </a:spcBef>
+              <a:defRPr/>
+            </a:pPr>
+            <a:r>
+              <a:rPr lang="ru-RU" sz="2699" dirty="0">
+                <a:solidFill>
+                  <a:srgbClr val="A08B7B"/>
+                </a:solidFill>
+                <a:latin typeface="Intro"/>
+              </a:rPr>
+              <a:t>зависимости не выявлено</a:t>
+            </a:r>
+            <a:endParaRPr lang="en-US" sz="2699" dirty="0">
+              <a:solidFill>
+                <a:srgbClr val="A08B7B"/>
+              </a:solidFill>
+              <a:latin typeface="Intro"/>
+            </a:endParaRPr>
           </a:p>
         </p:txBody>
       </p:sp>
@@ -3959,6 +4060,388 @@
         </p:nvSpPr>
         <p:spPr>
           <a:xfrm>
+            <a:off x="5993745" y="1842857"/>
+            <a:ext cx="6960260" cy="6960260"/>
+          </a:xfrm>
+          <a:custGeom>
+            <a:avLst/>
+            <a:gdLst/>
+            <a:ahLst/>
+            <a:cxnLst/>
+            <a:rect l="l" t="t" r="r" b="b"/>
+            <a:pathLst>
+              <a:path w="6960260" h="6960260">
+                <a:moveTo>
+                  <a:pt x="0" y="0"/>
+                </a:moveTo>
+                <a:lnTo>
+                  <a:pt x="6960260" y="0"/>
+                </a:lnTo>
+                <a:lnTo>
+                  <a:pt x="6960260" y="6960260"/>
+                </a:lnTo>
+                <a:lnTo>
+                  <a:pt x="0" y="6960260"/>
+                </a:lnTo>
+                <a:lnTo>
+                  <a:pt x="0" y="0"/>
+                </a:lnTo>
+                <a:close/>
+              </a:path>
+            </a:pathLst>
+          </a:custGeom>
+          <a:blipFill>
+            <a:blip r:embed="rId2"/>
+            <a:stretch>
+              <a:fillRect/>
+            </a:stretch>
+          </a:blipFill>
+        </p:spPr>
+      </p:sp>
+      <p:sp>
+        <p:nvSpPr>
+          <p:cNvPr id="8" name="TextBox 8"/>
+          <p:cNvSpPr txBox="1"/>
+          <p:nvPr/>
+        </p:nvSpPr>
+        <p:spPr>
+          <a:xfrm>
+            <a:off x="14299551" y="8660242"/>
+            <a:ext cx="2959749" cy="329642"/>
+          </a:xfrm>
+          <a:prstGeom prst="rect">
+            <a:avLst/>
+          </a:prstGeom>
+        </p:spPr>
+        <p:txBody>
+          <a:bodyPr lIns="0" tIns="0" rIns="0" bIns="0" rtlCol="0" anchor="t">
+            <a:spAutoFit/>
+          </a:bodyPr>
+          <a:lstStyle/>
+          <a:p>
+            <a:pPr algn="r">
+              <a:lnSpc>
+                <a:spcPts val="2800"/>
+              </a:lnSpc>
+              <a:spcBef>
+                <a:spcPct val="0"/>
+              </a:spcBef>
+            </a:pPr>
+            <a:r>
+              <a:rPr lang="en-US" sz="2000" spc="600" dirty="0">
+                <a:solidFill>
+                  <a:srgbClr val="000000"/>
+                </a:solidFill>
+                <a:latin typeface="Inter"/>
+              </a:rPr>
+              <a:t>PAGE 11</a:t>
+            </a:r>
+          </a:p>
+        </p:txBody>
+      </p:sp>
+      <p:sp>
+        <p:nvSpPr>
+          <p:cNvPr id="9" name="TextBox 9"/>
+          <p:cNvSpPr txBox="1"/>
+          <p:nvPr/>
+        </p:nvSpPr>
+        <p:spPr>
+          <a:xfrm>
+            <a:off x="1790266" y="2117065"/>
+            <a:ext cx="1840594" cy="1560170"/>
+          </a:xfrm>
+          <a:prstGeom prst="rect">
+            <a:avLst/>
+          </a:prstGeom>
+        </p:spPr>
+        <p:txBody>
+          <a:bodyPr lIns="0" tIns="0" rIns="0" bIns="0" rtlCol="0" anchor="t">
+            <a:spAutoFit/>
+          </a:bodyPr>
+          <a:lstStyle/>
+          <a:p>
+            <a:pPr>
+              <a:lnSpc>
+                <a:spcPts val="12706"/>
+              </a:lnSpc>
+            </a:pPr>
+            <a:r>
+              <a:rPr lang="en-US" sz="9075">
+                <a:solidFill>
+                  <a:srgbClr val="000000"/>
+                </a:solidFill>
+                <a:latin typeface="Intro"/>
+              </a:rPr>
+              <a:t>3.6</a:t>
+            </a:r>
+          </a:p>
+        </p:txBody>
+      </p:sp>
+      <p:sp>
+        <p:nvSpPr>
+          <p:cNvPr id="10" name="TextBox 10"/>
+          <p:cNvSpPr txBox="1"/>
+          <p:nvPr/>
+        </p:nvSpPr>
+        <p:spPr>
+          <a:xfrm>
+            <a:off x="4749438" y="1624940"/>
+            <a:ext cx="11665034" cy="1298575"/>
+          </a:xfrm>
+          <a:prstGeom prst="rect">
+            <a:avLst/>
+          </a:prstGeom>
+        </p:spPr>
+        <p:txBody>
+          <a:bodyPr lIns="0" tIns="0" rIns="0" bIns="0" rtlCol="0" anchor="t">
+            <a:spAutoFit/>
+          </a:bodyPr>
+          <a:lstStyle/>
+          <a:p>
+            <a:pPr algn="just">
+              <a:lnSpc>
+                <a:spcPts val="3499"/>
+              </a:lnSpc>
+              <a:spcBef>
+                <a:spcPct val="0"/>
+              </a:spcBef>
+            </a:pPr>
+            <a:r>
+              <a:rPr lang="en-US" sz="2499" spc="749">
+                <a:solidFill>
+                  <a:srgbClr val="000000"/>
+                </a:solidFill>
+                <a:latin typeface="Inter"/>
+              </a:rPr>
+              <a:t>ПРОВЕРИТЬ АДЕКВАТНОСТЬ ПОСТАВЛЕННОГО ДИАГНОЗА ПО СТАДИИ ХРОНИЧЕСКОЙ БОЛЕЗНИ ПОЧЕК</a:t>
+            </a:r>
+          </a:p>
+        </p:txBody>
+      </p:sp>
+      <p:sp>
+        <p:nvSpPr>
+          <p:cNvPr id="11" name="TextBox 11"/>
+          <p:cNvSpPr txBox="1"/>
+          <p:nvPr/>
+        </p:nvSpPr>
+        <p:spPr>
+          <a:xfrm>
+            <a:off x="6730048" y="8765017"/>
+            <a:ext cx="7474253" cy="344761"/>
+          </a:xfrm>
+          <a:prstGeom prst="rect">
+            <a:avLst/>
+          </a:prstGeom>
+        </p:spPr>
+        <p:txBody>
+          <a:bodyPr lIns="0" tIns="0" rIns="0" bIns="0" rtlCol="0" anchor="t">
+            <a:spAutoFit/>
+          </a:bodyPr>
+          <a:lstStyle/>
+          <a:p>
+            <a:pPr>
+              <a:lnSpc>
+                <a:spcPts val="2846"/>
+              </a:lnSpc>
+              <a:spcBef>
+                <a:spcPct val="0"/>
+              </a:spcBef>
+            </a:pPr>
+            <a:r>
+              <a:rPr lang="en-US" sz="2033">
+                <a:solidFill>
+                  <a:srgbClr val="000000"/>
+                </a:solidFill>
+                <a:latin typeface="Now"/>
+              </a:rPr>
+              <a:t>СТАДИЯ РАЗВИТИЯ ХБП ОПРЕДЕЛЯЛАСЬ ПО СКФ</a:t>
+            </a:r>
+          </a:p>
+        </p:txBody>
+      </p:sp>
+    </p:spTree>
+  </p:cSld>
+  <p:clrMapOvr>
+    <a:masterClrMapping/>
+  </p:clrMapOvr>
+</p:sld>
+</file>
+
+<file path=ppt/slides/slide12.xml><?xml version="1.0" encoding="utf-8"?>
+<p:sld xmlns:a="http://schemas.openxmlformats.org/drawingml/2006/main" xmlns:r="http://schemas.openxmlformats.org/officeDocument/2006/relationships" xmlns:p="http://schemas.openxmlformats.org/presentationml/2006/main">
+  <p:cSld>
+    <p:bg>
+      <p:bgPr>
+        <a:solidFill>
+          <a:srgbClr val="FDFDFD"/>
+        </a:solidFill>
+        <a:effectLst/>
+      </p:bgPr>
+    </p:bg>
+    <p:spTree>
+      <p:nvGrpSpPr>
+        <p:cNvPr id="1" name=""/>
+        <p:cNvGrpSpPr/>
+        <p:nvPr/>
+      </p:nvGrpSpPr>
+      <p:grpSpPr>
+        <a:xfrm>
+          <a:off x="0" y="0"/>
+          <a:ext cx="0" cy="0"/>
+          <a:chOff x="0" y="0"/>
+          <a:chExt cx="0" cy="0"/>
+        </a:xfrm>
+      </p:grpSpPr>
+      <p:sp>
+        <p:nvSpPr>
+          <p:cNvPr id="2" name="AutoShape 2"/>
+          <p:cNvSpPr/>
+          <p:nvPr/>
+        </p:nvSpPr>
+        <p:spPr>
+          <a:xfrm>
+            <a:off x="1028700" y="9239250"/>
+            <a:ext cx="16230600" cy="0"/>
+          </a:xfrm>
+          <a:prstGeom prst="line">
+            <a:avLst/>
+          </a:prstGeom>
+          <a:ln w="19050" cap="flat">
+            <a:solidFill>
+              <a:srgbClr val="000000"/>
+            </a:solidFill>
+            <a:prstDash val="solid"/>
+            <a:headEnd type="none" w="sm" len="sm"/>
+            <a:tailEnd type="none" w="sm" len="sm"/>
+          </a:ln>
+        </p:spPr>
+      </p:sp>
+      <p:sp>
+        <p:nvSpPr>
+          <p:cNvPr id="3" name="AutoShape 3"/>
+          <p:cNvSpPr/>
+          <p:nvPr/>
+        </p:nvSpPr>
+        <p:spPr>
+          <a:xfrm>
+            <a:off x="1028700" y="1028700"/>
+            <a:ext cx="16230600" cy="0"/>
+          </a:xfrm>
+          <a:prstGeom prst="line">
+            <a:avLst/>
+          </a:prstGeom>
+          <a:ln w="19050" cap="flat">
+            <a:solidFill>
+              <a:srgbClr val="000000"/>
+            </a:solidFill>
+            <a:prstDash val="solid"/>
+            <a:headEnd type="none" w="sm" len="sm"/>
+            <a:tailEnd type="none" w="sm" len="sm"/>
+          </a:ln>
+        </p:spPr>
+      </p:sp>
+      <p:grpSp>
+        <p:nvGrpSpPr>
+          <p:cNvPr id="4" name="Group 4"/>
+          <p:cNvGrpSpPr/>
+          <p:nvPr/>
+        </p:nvGrpSpPr>
+        <p:grpSpPr>
+          <a:xfrm>
+            <a:off x="1028700" y="1444588"/>
+            <a:ext cx="3086100" cy="3086100"/>
+            <a:chOff x="0" y="0"/>
+            <a:chExt cx="812800" cy="812800"/>
+          </a:xfrm>
+        </p:grpSpPr>
+        <p:sp>
+          <p:nvSpPr>
+            <p:cNvPr id="5" name="Freeform 5"/>
+            <p:cNvSpPr/>
+            <p:nvPr/>
+          </p:nvSpPr>
+          <p:spPr>
+            <a:xfrm>
+              <a:off x="0" y="0"/>
+              <a:ext cx="812800" cy="812800"/>
+            </a:xfrm>
+            <a:custGeom>
+              <a:avLst/>
+              <a:gdLst/>
+              <a:ahLst/>
+              <a:cxnLst/>
+              <a:rect l="l" t="t" r="r" b="b"/>
+              <a:pathLst>
+                <a:path w="812800" h="812800">
+                  <a:moveTo>
+                    <a:pt x="406400" y="0"/>
+                  </a:moveTo>
+                  <a:cubicBezTo>
+                    <a:pt x="181951" y="0"/>
+                    <a:pt x="0" y="181951"/>
+                    <a:pt x="0" y="406400"/>
+                  </a:cubicBezTo>
+                  <a:cubicBezTo>
+                    <a:pt x="0" y="630849"/>
+                    <a:pt x="181951" y="812800"/>
+                    <a:pt x="406400" y="812800"/>
+                  </a:cubicBezTo>
+                  <a:cubicBezTo>
+                    <a:pt x="630849" y="812800"/>
+                    <a:pt x="812800" y="630849"/>
+                    <a:pt x="812800" y="406400"/>
+                  </a:cubicBezTo>
+                  <a:cubicBezTo>
+                    <a:pt x="812800" y="181951"/>
+                    <a:pt x="630849" y="0"/>
+                    <a:pt x="406400" y="0"/>
+                  </a:cubicBezTo>
+                  <a:close/>
+                </a:path>
+              </a:pathLst>
+            </a:custGeom>
+            <a:solidFill>
+              <a:srgbClr val="F4EFED"/>
+            </a:solidFill>
+          </p:spPr>
+        </p:sp>
+        <p:sp>
+          <p:nvSpPr>
+            <p:cNvPr id="6" name="TextBox 6"/>
+            <p:cNvSpPr txBox="1"/>
+            <p:nvPr/>
+          </p:nvSpPr>
+          <p:spPr>
+            <a:xfrm>
+              <a:off x="76200" y="38100"/>
+              <a:ext cx="660400" cy="698500"/>
+            </a:xfrm>
+            <a:prstGeom prst="rect">
+              <a:avLst/>
+            </a:prstGeom>
+          </p:spPr>
+          <p:txBody>
+            <a:bodyPr lIns="50800" tIns="50800" rIns="50800" bIns="50800" rtlCol="0" anchor="ctr"/>
+            <a:lstStyle/>
+            <a:p>
+              <a:pPr algn="ctr">
+                <a:lnSpc>
+                  <a:spcPts val="2800"/>
+                </a:lnSpc>
+              </a:pPr>
+              <a:endParaRPr/>
+            </a:p>
+          </p:txBody>
+        </p:sp>
+      </p:grpSp>
+      <p:sp>
+        <p:nvSpPr>
+          <p:cNvPr id="7" name="Freeform 7"/>
+          <p:cNvSpPr/>
+          <p:nvPr/>
+        </p:nvSpPr>
+        <p:spPr>
+          <a:xfrm>
             <a:off x="4302708" y="3138450"/>
             <a:ext cx="10391601" cy="5871042"/>
           </a:xfrm>
@@ -4006,7 +4489,7 @@
         <p:spPr>
           <a:xfrm>
             <a:off x="14299551" y="8660242"/>
-            <a:ext cx="2959749" cy="349250"/>
+            <a:ext cx="2959749" cy="329642"/>
           </a:xfrm>
           <a:prstGeom prst="rect">
             <a:avLst/>
@@ -4027,13 +4510,13 @@
               </a:spcBef>
             </a:pPr>
             <a:r>
-              <a:rPr lang="en-US" sz="2000" spc="600">
+              <a:rPr lang="en-US" sz="2000" spc="600" dirty="0">
                 <a:solidFill>
                   <a:srgbClr val="000000"/>
                 </a:solidFill>
                 <a:latin typeface="Inter"/>
               </a:rPr>
-              <a:t>PAGE 11</a:t>
+              <a:t>PAGE 12</a:t>
             </a:r>
           </a:p>
         </p:txBody>
@@ -4125,7 +4608,7 @@
 </p:sld>
 </file>
 
-<file path=ppt/slides/slide12.xml><?xml version="1.0" encoding="utf-8"?>
+<file path=ppt/slides/slide13.xml><?xml version="1.0" encoding="utf-8"?>
 <p:sld xmlns:a="http://schemas.openxmlformats.org/drawingml/2006/main" xmlns:r="http://schemas.openxmlformats.org/officeDocument/2006/relationships" xmlns:p="http://schemas.openxmlformats.org/presentationml/2006/main">
   <p:cSld>
     <p:spTree>
@@ -5853,7 +6336,7 @@
                 </a:solidFill>
                 <a:latin typeface="Inter"/>
               </a:rPr>
-              <a:t>PAGE 12</a:t>
+              <a:t>PAGE 13</a:t>
             </a:r>
           </a:p>
         </p:txBody>
@@ -6115,7 +6598,7 @@
 </p:sld>
 </file>
 
-<file path=ppt/slides/slide13.xml><?xml version="1.0" encoding="utf-8"?>
+<file path=ppt/slides/slide14.xml><?xml version="1.0" encoding="utf-8"?>
 <p:sld xmlns:a="http://schemas.openxmlformats.org/drawingml/2006/main" xmlns:r="http://schemas.openxmlformats.org/officeDocument/2006/relationships" xmlns:p="http://schemas.openxmlformats.org/presentationml/2006/main">
   <p:cSld>
     <p:spTree>
@@ -7763,23 +8246,8 @@
                 </a:solidFill>
                 <a:latin typeface="Inter"/>
               </a:rPr>
-              <a:t>PAGE 1</a:t>
+              <a:t>PAGE 14</a:t>
             </a:r>
-            <a:r>
-              <a:rPr lang="ru-RU" sz="2000" spc="600" dirty="0">
-                <a:solidFill>
-                  <a:srgbClr val="000000"/>
-                </a:solidFill>
-                <a:latin typeface="Inter"/>
-              </a:rPr>
-              <a:t>3</a:t>
-            </a:r>
-            <a:endParaRPr lang="en-US" sz="2000" spc="600" dirty="0">
-              <a:solidFill>
-                <a:srgbClr val="000000"/>
-              </a:solidFill>
-              <a:latin typeface="Inter"/>
-            </a:endParaRPr>
           </a:p>
         </p:txBody>
       </p:sp>
@@ -8082,7 +8550,7 @@
 </p:sld>
 </file>
 
-<file path=ppt/slides/slide14.xml><?xml version="1.0" encoding="utf-8"?>
+<file path=ppt/slides/slide15.xml><?xml version="1.0" encoding="utf-8"?>
 <p:sld xmlns:a="http://schemas.openxmlformats.org/drawingml/2006/main" xmlns:r="http://schemas.openxmlformats.org/officeDocument/2006/relationships" xmlns:p="http://schemas.openxmlformats.org/presentationml/2006/main">
   <p:cSld>
     <p:bg>
@@ -8337,7 +8805,7 @@
                 </a:solidFill>
                 <a:latin typeface="Inter"/>
               </a:rPr>
-              <a:t>PAGE 14</a:t>
+              <a:t>PAGE 15</a:t>
             </a:r>
           </a:p>
         </p:txBody>
@@ -8429,7 +8897,7 @@
 </p:sld>
 </file>
 
-<file path=ppt/slides/slide15.xml><?xml version="1.0" encoding="utf-8"?>
+<file path=ppt/slides/slide16.xml><?xml version="1.0" encoding="utf-8"?>
 <p:sld xmlns:a="http://schemas.openxmlformats.org/drawingml/2006/main" xmlns:r="http://schemas.openxmlformats.org/officeDocument/2006/relationships" xmlns:p="http://schemas.openxmlformats.org/presentationml/2006/main">
   <p:cSld>
     <p:bg>
@@ -8944,7 +9412,7 @@
                 </a:solidFill>
                 <a:latin typeface="Inter"/>
               </a:rPr>
-              <a:t>PAGE 15</a:t>
+              <a:t>PAGE 16</a:t>
             </a:r>
           </a:p>
         </p:txBody>
@@ -11189,13 +11657,22 @@
               </a:lnSpc>
             </a:pPr>
             <a:r>
-              <a:rPr lang="en-US" sz="6132">
+              <a:rPr lang="en-US" sz="6132" dirty="0" err="1">
                 <a:solidFill>
                   <a:srgbClr val="000000"/>
                 </a:solidFill>
                 <a:latin typeface="Intro"/>
               </a:rPr>
-              <a:t>Предобработка </a:t>
+              <a:t>Предобработка</a:t>
+            </a:r>
+            <a:r>
+              <a:rPr lang="en-US" sz="6132" dirty="0">
+                <a:solidFill>
+                  <a:srgbClr val="000000"/>
+                </a:solidFill>
+                <a:latin typeface="Intro"/>
+              </a:rPr>
+              <a:t> </a:t>
             </a:r>
           </a:p>
         </p:txBody>
@@ -11209,6 +11686,260 @@
 </file>
 
 <file path=ppt/slides/slide5.xml><?xml version="1.0" encoding="utf-8"?>
+<p:sld xmlns:a="http://schemas.openxmlformats.org/drawingml/2006/main" xmlns:r="http://schemas.openxmlformats.org/officeDocument/2006/relationships" xmlns:p="http://schemas.openxmlformats.org/presentationml/2006/main">
+  <p:cSld>
+    <p:bg>
+      <p:bgPr>
+        <a:solidFill>
+          <a:srgbClr val="FDFDFD"/>
+        </a:solidFill>
+        <a:effectLst/>
+      </p:bgPr>
+    </p:bg>
+    <p:spTree>
+      <p:nvGrpSpPr>
+        <p:cNvPr id="1" name=""/>
+        <p:cNvGrpSpPr/>
+        <p:nvPr/>
+      </p:nvGrpSpPr>
+      <p:grpSpPr>
+        <a:xfrm>
+          <a:off x="0" y="0"/>
+          <a:ext cx="0" cy="0"/>
+          <a:chOff x="0" y="0"/>
+          <a:chExt cx="0" cy="0"/>
+        </a:xfrm>
+      </p:grpSpPr>
+      <p:pic>
+        <p:nvPicPr>
+          <p:cNvPr id="24" name="Рисунок 23">
+            <a:extLst>
+              <a:ext uri="{FF2B5EF4-FFF2-40B4-BE49-F238E27FC236}">
+                <a16:creationId xmlns:a16="http://schemas.microsoft.com/office/drawing/2014/main" id="{46430DD6-53B5-4435-8C46-AE6CC72A920D}"/>
+              </a:ext>
+            </a:extLst>
+          </p:cNvPr>
+          <p:cNvPicPr>
+            <a:picLocks noChangeAspect="1"/>
+          </p:cNvPicPr>
+          <p:nvPr/>
+        </p:nvPicPr>
+        <p:blipFill>
+          <a:blip r:embed="rId2">
+            <a:extLst>
+              <a:ext uri="{28A0092B-C50C-407E-A947-70E740481C1C}">
+                <a14:useLocalDpi xmlns:a14="http://schemas.microsoft.com/office/drawing/2010/main" val="0"/>
+              </a:ext>
+            </a:extLst>
+          </a:blip>
+          <a:stretch>
+            <a:fillRect/>
+          </a:stretch>
+        </p:blipFill>
+        <p:spPr>
+          <a:xfrm>
+            <a:off x="-19455" y="18645"/>
+            <a:ext cx="18307456" cy="10268355"/>
+          </a:xfrm>
+          <a:prstGeom prst="rect">
+            <a:avLst/>
+          </a:prstGeom>
+        </p:spPr>
+      </p:pic>
+      <p:sp>
+        <p:nvSpPr>
+          <p:cNvPr id="2" name="AutoShape 2"/>
+          <p:cNvSpPr/>
+          <p:nvPr/>
+        </p:nvSpPr>
+        <p:spPr>
+          <a:xfrm>
+            <a:off x="1028700" y="9239250"/>
+            <a:ext cx="16230600" cy="0"/>
+          </a:xfrm>
+          <a:prstGeom prst="line">
+            <a:avLst/>
+          </a:prstGeom>
+          <a:ln w="19050" cap="flat">
+            <a:solidFill>
+              <a:schemeClr val="bg1"/>
+            </a:solidFill>
+            <a:prstDash val="solid"/>
+            <a:headEnd type="none" w="sm" len="sm"/>
+            <a:tailEnd type="none" w="sm" len="sm"/>
+          </a:ln>
+        </p:spPr>
+      </p:sp>
+      <p:sp>
+        <p:nvSpPr>
+          <p:cNvPr id="3" name="AutoShape 3"/>
+          <p:cNvSpPr/>
+          <p:nvPr/>
+        </p:nvSpPr>
+        <p:spPr>
+          <a:xfrm>
+            <a:off x="1028700" y="1028700"/>
+            <a:ext cx="16230600" cy="0"/>
+          </a:xfrm>
+          <a:prstGeom prst="line">
+            <a:avLst/>
+          </a:prstGeom>
+          <a:ln w="19050" cap="flat">
+            <a:solidFill>
+              <a:schemeClr val="bg1"/>
+            </a:solidFill>
+            <a:prstDash val="solid"/>
+            <a:headEnd type="none" w="sm" len="sm"/>
+            <a:tailEnd type="none" w="sm" len="sm"/>
+          </a:ln>
+        </p:spPr>
+      </p:sp>
+      <p:sp>
+        <p:nvSpPr>
+          <p:cNvPr id="8" name="TextBox 8"/>
+          <p:cNvSpPr txBox="1"/>
+          <p:nvPr/>
+        </p:nvSpPr>
+        <p:spPr>
+          <a:xfrm>
+            <a:off x="14299551" y="8660242"/>
+            <a:ext cx="2959749" cy="329642"/>
+          </a:xfrm>
+          <a:prstGeom prst="rect">
+            <a:avLst/>
+          </a:prstGeom>
+        </p:spPr>
+        <p:txBody>
+          <a:bodyPr lIns="0" tIns="0" rIns="0" bIns="0" rtlCol="0" anchor="t">
+            <a:spAutoFit/>
+          </a:bodyPr>
+          <a:lstStyle/>
+          <a:p>
+            <a:pPr algn="r">
+              <a:lnSpc>
+                <a:spcPts val="2800"/>
+              </a:lnSpc>
+              <a:spcBef>
+                <a:spcPct val="0"/>
+              </a:spcBef>
+            </a:pPr>
+            <a:r>
+              <a:rPr lang="en-US" sz="2000" spc="600" dirty="0">
+                <a:solidFill>
+                  <a:schemeClr val="bg1"/>
+                </a:solidFill>
+                <a:latin typeface="Inter"/>
+              </a:rPr>
+              <a:t>PAGE 05</a:t>
+            </a:r>
+          </a:p>
+        </p:txBody>
+      </p:sp>
+      <p:sp>
+        <p:nvSpPr>
+          <p:cNvPr id="22" name="TextBox 22"/>
+          <p:cNvSpPr txBox="1"/>
+          <p:nvPr/>
+        </p:nvSpPr>
+        <p:spPr>
+          <a:xfrm>
+            <a:off x="2590800" y="5829300"/>
+            <a:ext cx="2154841" cy="1511761"/>
+          </a:xfrm>
+          <a:prstGeom prst="rect">
+            <a:avLst/>
+          </a:prstGeom>
+        </p:spPr>
+        <p:txBody>
+          <a:bodyPr wrap="square" lIns="0" tIns="0" rIns="0" bIns="0" rtlCol="0" anchor="t">
+            <a:spAutoFit/>
+          </a:bodyPr>
+          <a:lstStyle/>
+          <a:p>
+            <a:pPr>
+              <a:lnSpc>
+                <a:spcPts val="12706"/>
+              </a:lnSpc>
+            </a:pPr>
+            <a:r>
+              <a:rPr lang="en-US" sz="9075" dirty="0">
+                <a:solidFill>
+                  <a:schemeClr val="bg1"/>
+                </a:solidFill>
+                <a:latin typeface="Intro"/>
+              </a:rPr>
+              <a:t>2.7 </a:t>
+            </a:r>
+          </a:p>
+        </p:txBody>
+      </p:sp>
+      <p:sp>
+        <p:nvSpPr>
+          <p:cNvPr id="25" name="TextBox 22">
+            <a:extLst>
+              <a:ext uri="{FF2B5EF4-FFF2-40B4-BE49-F238E27FC236}">
+                <a16:creationId xmlns:a16="http://schemas.microsoft.com/office/drawing/2014/main" id="{8D67A01E-57CA-4BC5-BCBC-CFF56213CA79}"/>
+              </a:ext>
+            </a:extLst>
+          </p:cNvPr>
+          <p:cNvSpPr txBox="1"/>
+          <p:nvPr/>
+        </p:nvSpPr>
+        <p:spPr>
+          <a:xfrm>
+            <a:off x="10362765" y="214460"/>
+            <a:ext cx="7410886" cy="1055752"/>
+          </a:xfrm>
+          <a:prstGeom prst="rect">
+            <a:avLst/>
+          </a:prstGeom>
+        </p:spPr>
+        <p:txBody>
+          <a:bodyPr lIns="0" tIns="0" rIns="0" bIns="0" rtlCol="0" anchor="t">
+            <a:spAutoFit/>
+          </a:bodyPr>
+          <a:lstStyle/>
+          <a:p>
+            <a:pPr>
+              <a:lnSpc>
+                <a:spcPts val="8585"/>
+              </a:lnSpc>
+            </a:pPr>
+            <a:r>
+              <a:rPr lang="en-US" sz="6132" dirty="0" err="1">
+                <a:solidFill>
+                  <a:schemeClr val="bg1"/>
+                </a:solidFill>
+                <a:latin typeface="Intro"/>
+              </a:rPr>
+              <a:t>datalens</a:t>
+            </a:r>
+            <a:r>
+              <a:rPr lang="en-US" sz="6132" dirty="0">
+                <a:solidFill>
+                  <a:srgbClr val="000000"/>
+                </a:solidFill>
+                <a:latin typeface="Intro"/>
+              </a:rPr>
+              <a:t> </a:t>
+            </a:r>
+          </a:p>
+        </p:txBody>
+      </p:sp>
+    </p:spTree>
+    <p:extLst>
+      <p:ext uri="{BB962C8B-B14F-4D97-AF65-F5344CB8AC3E}">
+        <p14:creationId xmlns:p14="http://schemas.microsoft.com/office/powerpoint/2010/main" val="1011655600"/>
+      </p:ext>
+    </p:extLst>
+  </p:cSld>
+  <p:clrMapOvr>
+    <a:masterClrMapping/>
+  </p:clrMapOvr>
+</p:sld>
+</file>
+
+<file path=ppt/slides/slide6.xml><?xml version="1.0" encoding="utf-8"?>
 <p:sld xmlns:a="http://schemas.openxmlformats.org/drawingml/2006/main" xmlns:r="http://schemas.openxmlformats.org/officeDocument/2006/relationships" xmlns:p="http://schemas.openxmlformats.org/presentationml/2006/main">
   <p:cSld>
     <p:bg>
@@ -12190,7 +12921,7 @@
         <p:spPr>
           <a:xfrm>
             <a:off x="14299551" y="8660242"/>
-            <a:ext cx="2959749" cy="349250"/>
+            <a:ext cx="2959749" cy="329642"/>
           </a:xfrm>
           <a:prstGeom prst="rect">
             <a:avLst/>
@@ -12211,13 +12942,13 @@
               </a:spcBef>
             </a:pPr>
             <a:r>
-              <a:rPr lang="en-US" sz="2000" spc="600">
+              <a:rPr lang="en-US" sz="2000" spc="600" dirty="0">
                 <a:solidFill>
                   <a:srgbClr val="000000"/>
                 </a:solidFill>
                 <a:latin typeface="Inter"/>
               </a:rPr>
-              <a:t>PAGE 05</a:t>
+              <a:t>PAGE 06</a:t>
             </a:r>
           </a:p>
         </p:txBody>
@@ -12249,7 +12980,7 @@
               </a:lnSpc>
             </a:pPr>
             <a:r>
-              <a:rPr lang="en-US" sz="9075">
+              <a:rPr lang="en-US" sz="9075" dirty="0">
                 <a:solidFill>
                   <a:srgbClr val="000000"/>
                 </a:solidFill>
@@ -12328,7 +13059,7 @@
 </p:sld>
 </file>
 
-<file path=ppt/slides/slide6.xml><?xml version="1.0" encoding="utf-8"?>
+<file path=ppt/slides/slide7.xml><?xml version="1.0" encoding="utf-8"?>
 <p:sld xmlns:a="http://schemas.openxmlformats.org/drawingml/2006/main" xmlns:r="http://schemas.openxmlformats.org/officeDocument/2006/relationships" xmlns:p="http://schemas.openxmlformats.org/presentationml/2006/main">
   <p:cSld>
     <p:bg>
@@ -13530,7 +14261,7 @@
         <p:spPr>
           <a:xfrm>
             <a:off x="14299551" y="8660242"/>
-            <a:ext cx="2959749" cy="349250"/>
+            <a:ext cx="2959749" cy="329642"/>
           </a:xfrm>
           <a:prstGeom prst="rect">
             <a:avLst/>
@@ -13551,13 +14282,13 @@
               </a:spcBef>
             </a:pPr>
             <a:r>
-              <a:rPr lang="en-US" sz="2000" spc="600">
+              <a:rPr lang="en-US" sz="2000" spc="600" dirty="0">
                 <a:solidFill>
                   <a:srgbClr val="000000"/>
                 </a:solidFill>
                 <a:latin typeface="Inter"/>
               </a:rPr>
-              <a:t>PAGE 06</a:t>
+              <a:t>PAGE 07</a:t>
             </a:r>
           </a:p>
         </p:txBody>
@@ -13649,7 +14380,7 @@
 </p:sld>
 </file>
 
-<file path=ppt/slides/slide7.xml><?xml version="1.0" encoding="utf-8"?>
+<file path=ppt/slides/slide8.xml><?xml version="1.0" encoding="utf-8"?>
 <p:sld xmlns:a="http://schemas.openxmlformats.org/drawingml/2006/main" xmlns:r="http://schemas.openxmlformats.org/officeDocument/2006/relationships" xmlns:p="http://schemas.openxmlformats.org/presentationml/2006/main">
   <p:cSld>
     <p:bg>
@@ -13871,7 +14602,7 @@
         <p:spPr>
           <a:xfrm>
             <a:off x="14299551" y="8660242"/>
-            <a:ext cx="2959749" cy="349250"/>
+            <a:ext cx="2959749" cy="329642"/>
           </a:xfrm>
           <a:prstGeom prst="rect">
             <a:avLst/>
@@ -13892,13 +14623,13 @@
               </a:spcBef>
             </a:pPr>
             <a:r>
-              <a:rPr lang="en-US" sz="2000" spc="600">
+              <a:rPr lang="en-US" sz="2000" spc="600" dirty="0">
                 <a:solidFill>
                   <a:srgbClr val="000000"/>
                 </a:solidFill>
                 <a:latin typeface="Inter"/>
               </a:rPr>
-              <a:t>PAGE 07</a:t>
+              <a:t>PAGE 08</a:t>
             </a:r>
           </a:p>
         </p:txBody>
@@ -14085,7 +14816,7 @@
 </p:sld>
 </file>
 
-<file path=ppt/slides/slide8.xml><?xml version="1.0" encoding="utf-8"?>
+<file path=ppt/slides/slide9.xml><?xml version="1.0" encoding="utf-8"?>
 <p:sld xmlns:a="http://schemas.openxmlformats.org/drawingml/2006/main" xmlns:r="http://schemas.openxmlformats.org/officeDocument/2006/relationships" xmlns:p="http://schemas.openxmlformats.org/presentationml/2006/main">
   <p:cSld>
     <p:bg>
@@ -14307,7 +15038,7 @@
         <p:spPr>
           <a:xfrm>
             <a:off x="14299551" y="8660242"/>
-            <a:ext cx="2959749" cy="349250"/>
+            <a:ext cx="2959749" cy="329642"/>
           </a:xfrm>
           <a:prstGeom prst="rect">
             <a:avLst/>
@@ -14328,13 +15059,13 @@
               </a:spcBef>
             </a:pPr>
             <a:r>
-              <a:rPr lang="en-US" sz="2000" spc="600">
+              <a:rPr lang="en-US" sz="2000" spc="600" dirty="0">
                 <a:solidFill>
                   <a:srgbClr val="000000"/>
                 </a:solidFill>
                 <a:latin typeface="Inter"/>
               </a:rPr>
-              <a:t>PAGE 08</a:t>
+              <a:t>PAGE 09</a:t>
             </a:r>
           </a:p>
         </p:txBody>
@@ -14528,488 +15259,6 @@
                 <a:latin typeface="Intro"/>
               </a:rPr>
               <a:t>Нет данных о пациентах с повышенным холестерином</a:t>
-            </a:r>
-            <a:endParaRPr lang="en-US" sz="2699" dirty="0">
-              <a:solidFill>
-                <a:srgbClr val="A08B7B"/>
-              </a:solidFill>
-              <a:latin typeface="Intro"/>
-            </a:endParaRPr>
-          </a:p>
-        </p:txBody>
-      </p:sp>
-    </p:spTree>
-  </p:cSld>
-  <p:clrMapOvr>
-    <a:masterClrMapping/>
-  </p:clrMapOvr>
-</p:sld>
-</file>
-
-<file path=ppt/slides/slide9.xml><?xml version="1.0" encoding="utf-8"?>
-<p:sld xmlns:a="http://schemas.openxmlformats.org/drawingml/2006/main" xmlns:r="http://schemas.openxmlformats.org/officeDocument/2006/relationships" xmlns:p="http://schemas.openxmlformats.org/presentationml/2006/main">
-  <p:cSld>
-    <p:bg>
-      <p:bgPr>
-        <a:solidFill>
-          <a:srgbClr val="FDFDFD"/>
-        </a:solidFill>
-        <a:effectLst/>
-      </p:bgPr>
-    </p:bg>
-    <p:spTree>
-      <p:nvGrpSpPr>
-        <p:cNvPr id="1" name=""/>
-        <p:cNvGrpSpPr/>
-        <p:nvPr/>
-      </p:nvGrpSpPr>
-      <p:grpSpPr>
-        <a:xfrm>
-          <a:off x="0" y="0"/>
-          <a:ext cx="0" cy="0"/>
-          <a:chOff x="0" y="0"/>
-          <a:chExt cx="0" cy="0"/>
-        </a:xfrm>
-      </p:grpSpPr>
-      <p:sp>
-        <p:nvSpPr>
-          <p:cNvPr id="2" name="AutoShape 2"/>
-          <p:cNvSpPr/>
-          <p:nvPr/>
-        </p:nvSpPr>
-        <p:spPr>
-          <a:xfrm>
-            <a:off x="1028700" y="9239250"/>
-            <a:ext cx="16230600" cy="0"/>
-          </a:xfrm>
-          <a:prstGeom prst="line">
-            <a:avLst/>
-          </a:prstGeom>
-          <a:ln w="19050" cap="flat">
-            <a:solidFill>
-              <a:srgbClr val="000000"/>
-            </a:solidFill>
-            <a:prstDash val="solid"/>
-            <a:headEnd type="none" w="sm" len="sm"/>
-            <a:tailEnd type="none" w="sm" len="sm"/>
-          </a:ln>
-        </p:spPr>
-      </p:sp>
-      <p:sp>
-        <p:nvSpPr>
-          <p:cNvPr id="3" name="AutoShape 3"/>
-          <p:cNvSpPr/>
-          <p:nvPr/>
-        </p:nvSpPr>
-        <p:spPr>
-          <a:xfrm>
-            <a:off x="1028700" y="1028700"/>
-            <a:ext cx="16230600" cy="0"/>
-          </a:xfrm>
-          <a:prstGeom prst="line">
-            <a:avLst/>
-          </a:prstGeom>
-          <a:ln w="19050" cap="flat">
-            <a:solidFill>
-              <a:srgbClr val="000000"/>
-            </a:solidFill>
-            <a:prstDash val="solid"/>
-            <a:headEnd type="none" w="sm" len="sm"/>
-            <a:tailEnd type="none" w="sm" len="sm"/>
-          </a:ln>
-        </p:spPr>
-      </p:sp>
-      <p:grpSp>
-        <p:nvGrpSpPr>
-          <p:cNvPr id="4" name="Group 4"/>
-          <p:cNvGrpSpPr/>
-          <p:nvPr/>
-        </p:nvGrpSpPr>
-        <p:grpSpPr>
-          <a:xfrm>
-            <a:off x="1028700" y="1444588"/>
-            <a:ext cx="3086100" cy="3086100"/>
-            <a:chOff x="0" y="0"/>
-            <a:chExt cx="812800" cy="812800"/>
-          </a:xfrm>
-        </p:grpSpPr>
-        <p:sp>
-          <p:nvSpPr>
-            <p:cNvPr id="5" name="Freeform 5"/>
-            <p:cNvSpPr/>
-            <p:nvPr/>
-          </p:nvSpPr>
-          <p:spPr>
-            <a:xfrm>
-              <a:off x="0" y="0"/>
-              <a:ext cx="812800" cy="812800"/>
-            </a:xfrm>
-            <a:custGeom>
-              <a:avLst/>
-              <a:gdLst/>
-              <a:ahLst/>
-              <a:cxnLst/>
-              <a:rect l="l" t="t" r="r" b="b"/>
-              <a:pathLst>
-                <a:path w="812800" h="812800">
-                  <a:moveTo>
-                    <a:pt x="406400" y="0"/>
-                  </a:moveTo>
-                  <a:cubicBezTo>
-                    <a:pt x="181951" y="0"/>
-                    <a:pt x="0" y="181951"/>
-                    <a:pt x="0" y="406400"/>
-                  </a:cubicBezTo>
-                  <a:cubicBezTo>
-                    <a:pt x="0" y="630849"/>
-                    <a:pt x="181951" y="812800"/>
-                    <a:pt x="406400" y="812800"/>
-                  </a:cubicBezTo>
-                  <a:cubicBezTo>
-                    <a:pt x="630849" y="812800"/>
-                    <a:pt x="812800" y="630849"/>
-                    <a:pt x="812800" y="406400"/>
-                  </a:cubicBezTo>
-                  <a:cubicBezTo>
-                    <a:pt x="812800" y="181951"/>
-                    <a:pt x="630849" y="0"/>
-                    <a:pt x="406400" y="0"/>
-                  </a:cubicBezTo>
-                  <a:close/>
-                </a:path>
-              </a:pathLst>
-            </a:custGeom>
-            <a:solidFill>
-              <a:srgbClr val="F4EFED"/>
-            </a:solidFill>
-          </p:spPr>
-        </p:sp>
-        <p:sp>
-          <p:nvSpPr>
-            <p:cNvPr id="6" name="TextBox 6"/>
-            <p:cNvSpPr txBox="1"/>
-            <p:nvPr/>
-          </p:nvSpPr>
-          <p:spPr>
-            <a:xfrm>
-              <a:off x="76200" y="38100"/>
-              <a:ext cx="660400" cy="698500"/>
-            </a:xfrm>
-            <a:prstGeom prst="rect">
-              <a:avLst/>
-            </a:prstGeom>
-          </p:spPr>
-          <p:txBody>
-            <a:bodyPr lIns="50800" tIns="50800" rIns="50800" bIns="50800" rtlCol="0" anchor="ctr"/>
-            <a:lstStyle/>
-            <a:p>
-              <a:pPr algn="ctr">
-                <a:lnSpc>
-                  <a:spcPts val="2800"/>
-                </a:lnSpc>
-              </a:pPr>
-              <a:endParaRPr/>
-            </a:p>
-          </p:txBody>
-        </p:sp>
-      </p:grpSp>
-      <p:sp>
-        <p:nvSpPr>
-          <p:cNvPr id="7" name="Freeform 7"/>
-          <p:cNvSpPr/>
-          <p:nvPr/>
-        </p:nvSpPr>
-        <p:spPr>
-          <a:xfrm>
-            <a:off x="6920478" y="2482741"/>
-            <a:ext cx="7669777" cy="5996525"/>
-          </a:xfrm>
-          <a:custGeom>
-            <a:avLst/>
-            <a:gdLst/>
-            <a:ahLst/>
-            <a:cxnLst/>
-            <a:rect l="l" t="t" r="r" b="b"/>
-            <a:pathLst>
-              <a:path w="7669777" h="5996525">
-                <a:moveTo>
-                  <a:pt x="0" y="0"/>
-                </a:moveTo>
-                <a:lnTo>
-                  <a:pt x="7669777" y="0"/>
-                </a:lnTo>
-                <a:lnTo>
-                  <a:pt x="7669777" y="5996526"/>
-                </a:lnTo>
-                <a:lnTo>
-                  <a:pt x="0" y="5996526"/>
-                </a:lnTo>
-                <a:lnTo>
-                  <a:pt x="0" y="0"/>
-                </a:lnTo>
-                <a:close/>
-              </a:path>
-            </a:pathLst>
-          </a:custGeom>
-          <a:blipFill>
-            <a:blip r:embed="rId2"/>
-            <a:stretch>
-              <a:fillRect/>
-            </a:stretch>
-          </a:blipFill>
-        </p:spPr>
-      </p:sp>
-      <p:sp>
-        <p:nvSpPr>
-          <p:cNvPr id="8" name="TextBox 8"/>
-          <p:cNvSpPr txBox="1"/>
-          <p:nvPr/>
-        </p:nvSpPr>
-        <p:spPr>
-          <a:xfrm>
-            <a:off x="14299551" y="8660242"/>
-            <a:ext cx="2959749" cy="349250"/>
-          </a:xfrm>
-          <a:prstGeom prst="rect">
-            <a:avLst/>
-          </a:prstGeom>
-        </p:spPr>
-        <p:txBody>
-          <a:bodyPr lIns="0" tIns="0" rIns="0" bIns="0" rtlCol="0" anchor="t">
-            <a:spAutoFit/>
-          </a:bodyPr>
-          <a:lstStyle/>
-          <a:p>
-            <a:pPr algn="r">
-              <a:lnSpc>
-                <a:spcPts val="2800"/>
-              </a:lnSpc>
-              <a:spcBef>
-                <a:spcPct val="0"/>
-              </a:spcBef>
-            </a:pPr>
-            <a:r>
-              <a:rPr lang="en-US" sz="2000" spc="600">
-                <a:solidFill>
-                  <a:srgbClr val="000000"/>
-                </a:solidFill>
-                <a:latin typeface="Inter"/>
-              </a:rPr>
-              <a:t>PAGE 09</a:t>
-            </a:r>
-          </a:p>
-        </p:txBody>
-      </p:sp>
-      <p:sp>
-        <p:nvSpPr>
-          <p:cNvPr id="9" name="TextBox 9"/>
-          <p:cNvSpPr txBox="1"/>
-          <p:nvPr/>
-        </p:nvSpPr>
-        <p:spPr>
-          <a:xfrm>
-            <a:off x="1790266" y="2117065"/>
-            <a:ext cx="1840594" cy="1560170"/>
-          </a:xfrm>
-          <a:prstGeom prst="rect">
-            <a:avLst/>
-          </a:prstGeom>
-        </p:spPr>
-        <p:txBody>
-          <a:bodyPr lIns="0" tIns="0" rIns="0" bIns="0" rtlCol="0" anchor="t">
-            <a:spAutoFit/>
-          </a:bodyPr>
-          <a:lstStyle/>
-          <a:p>
-            <a:pPr>
-              <a:lnSpc>
-                <a:spcPts val="12706"/>
-              </a:lnSpc>
-            </a:pPr>
-            <a:r>
-              <a:rPr lang="en-US" sz="9075">
-                <a:solidFill>
-                  <a:srgbClr val="000000"/>
-                </a:solidFill>
-                <a:latin typeface="Intro"/>
-              </a:rPr>
-              <a:t>3.5</a:t>
-            </a:r>
-          </a:p>
-        </p:txBody>
-      </p:sp>
-      <p:sp>
-        <p:nvSpPr>
-          <p:cNvPr id="10" name="TextBox 10"/>
-          <p:cNvSpPr txBox="1"/>
-          <p:nvPr/>
-        </p:nvSpPr>
-        <p:spPr>
-          <a:xfrm>
-            <a:off x="4749438" y="1624940"/>
-            <a:ext cx="11665034" cy="1298575"/>
-          </a:xfrm>
-          <a:prstGeom prst="rect">
-            <a:avLst/>
-          </a:prstGeom>
-        </p:spPr>
-        <p:txBody>
-          <a:bodyPr lIns="0" tIns="0" rIns="0" bIns="0" rtlCol="0" anchor="t">
-            <a:spAutoFit/>
-          </a:bodyPr>
-          <a:lstStyle/>
-          <a:p>
-            <a:pPr algn="just">
-              <a:lnSpc>
-                <a:spcPts val="3499"/>
-              </a:lnSpc>
-              <a:spcBef>
-                <a:spcPct val="0"/>
-              </a:spcBef>
-            </a:pPr>
-            <a:r>
-              <a:rPr lang="en-US" sz="2499" spc="749">
-                <a:solidFill>
-                  <a:srgbClr val="000000"/>
-                </a:solidFill>
-                <a:latin typeface="Inter"/>
-              </a:rPr>
-              <a:t>ВЕРНО ЛИ, ЧТО ДАЖЕ БЕЗ ХРОНИЧЕСКИХ БОЛЕЗНЕЙ ПОЧЕК С ВОЗРАСТОМ ТОЛЩИНА ПАРЕНХИМЫ ПОЧЕК УМЕНЬШАЕТСЯ?</a:t>
-            </a:r>
-          </a:p>
-        </p:txBody>
-      </p:sp>
-      <p:sp>
-        <p:nvSpPr>
-          <p:cNvPr id="11" name="TextBox 11"/>
-          <p:cNvSpPr txBox="1"/>
-          <p:nvPr/>
-        </p:nvSpPr>
-        <p:spPr>
-          <a:xfrm>
-            <a:off x="4114800" y="8157004"/>
-            <a:ext cx="12100358" cy="1054100"/>
-          </a:xfrm>
-          <a:prstGeom prst="rect">
-            <a:avLst/>
-          </a:prstGeom>
-        </p:spPr>
-        <p:txBody>
-          <a:bodyPr lIns="0" tIns="0" rIns="0" bIns="0" rtlCol="0" anchor="t">
-            <a:spAutoFit/>
-          </a:bodyPr>
-          <a:lstStyle/>
-          <a:p>
-            <a:pPr algn="ctr">
-              <a:lnSpc>
-                <a:spcPts val="2800"/>
-              </a:lnSpc>
-            </a:pPr>
-            <a:endParaRPr dirty="0"/>
-          </a:p>
-          <a:p>
-            <a:pPr algn="ctr">
-              <a:lnSpc>
-                <a:spcPts val="2800"/>
-              </a:lnSpc>
-              <a:spcBef>
-                <a:spcPct val="0"/>
-              </a:spcBef>
-            </a:pPr>
-            <a:r>
-              <a:rPr lang="en-US" sz="2000" spc="600" dirty="0">
-                <a:solidFill>
-                  <a:srgbClr val="000000"/>
-                </a:solidFill>
-                <a:latin typeface="Inter"/>
-              </a:rPr>
-              <a:t>statistic=-0.2286580163189256, </a:t>
-            </a:r>
-            <a:r>
-              <a:rPr lang="en-US" sz="2000" spc="600" dirty="0" err="1">
-                <a:solidFill>
-                  <a:srgbClr val="000000"/>
-                </a:solidFill>
-                <a:latin typeface="Inter"/>
-              </a:rPr>
-              <a:t>pvalue</a:t>
-            </a:r>
-            <a:r>
-              <a:rPr lang="en-US" sz="2000" spc="600" dirty="0">
-                <a:solidFill>
-                  <a:srgbClr val="000000"/>
-                </a:solidFill>
-                <a:latin typeface="Inter"/>
-              </a:rPr>
-              <a:t>=0.15584536629264173</a:t>
-            </a:r>
-          </a:p>
-        </p:txBody>
-      </p:sp>
-      <p:sp>
-        <p:nvSpPr>
-          <p:cNvPr id="12" name="TextBox 11">
-            <a:extLst>
-              <a:ext uri="{FF2B5EF4-FFF2-40B4-BE49-F238E27FC236}">
-                <a16:creationId xmlns:a16="http://schemas.microsoft.com/office/drawing/2014/main" id="{9F43B054-7091-4AD9-B94D-CD19E159CB92}"/>
-              </a:ext>
-            </a:extLst>
-          </p:cNvPr>
-          <p:cNvSpPr txBox="1"/>
-          <p:nvPr/>
-        </p:nvSpPr>
-        <p:spPr>
-          <a:xfrm>
-            <a:off x="457200" y="5635873"/>
-            <a:ext cx="5867400" cy="939103"/>
-          </a:xfrm>
-          <a:prstGeom prst="rect">
-            <a:avLst/>
-          </a:prstGeom>
-        </p:spPr>
-        <p:txBody>
-          <a:bodyPr wrap="square" lIns="0" tIns="0" rIns="0" bIns="0" rtlCol="0" anchor="t">
-            <a:spAutoFit/>
-          </a:bodyPr>
-          <a:lstStyle/>
-          <a:p>
-            <a:pPr algn="ctr">
-              <a:lnSpc>
-                <a:spcPts val="3779"/>
-              </a:lnSpc>
-              <a:spcBef>
-                <a:spcPct val="0"/>
-              </a:spcBef>
-              <a:defRPr/>
-            </a:pPr>
-            <a:r>
-              <a:rPr lang="ru-RU" sz="2699" dirty="0">
-                <a:solidFill>
-                  <a:srgbClr val="A08B7B"/>
-                </a:solidFill>
-                <a:latin typeface="Intro"/>
-              </a:rPr>
-              <a:t>Неверно </a:t>
-            </a:r>
-          </a:p>
-          <a:p>
-            <a:pPr algn="ctr">
-              <a:lnSpc>
-                <a:spcPts val="3779"/>
-              </a:lnSpc>
-              <a:spcBef>
-                <a:spcPct val="0"/>
-              </a:spcBef>
-              <a:defRPr/>
-            </a:pPr>
-            <a:r>
-              <a:rPr lang="ru-RU" sz="2699" dirty="0">
-                <a:solidFill>
-                  <a:srgbClr val="A08B7B"/>
-                </a:solidFill>
-                <a:latin typeface="Intro"/>
-              </a:rPr>
-              <a:t>зависимости не выявлено</a:t>
             </a:r>
             <a:endParaRPr lang="en-US" sz="2699" dirty="0">
               <a:solidFill>
